--- a/Assets/Ideas/필드 프롭 UI 배치.pptx
+++ b/Assets/Ideas/필드 프롭 UI 배치.pptx
@@ -260,7 +260,7 @@
           <a:p>
             <a:fld id="{D92049A4-B4B8-4181-8257-0C0C319DFF18}" type="datetimeFigureOut">
               <a:rPr lang="ko-KR" altLang="en-US" smtClean="0"/>
-              <a:t>2023-08-12</a:t>
+              <a:t>2023-08-21</a:t>
             </a:fld>
             <a:endParaRPr lang="ko-KR" altLang="en-US"/>
           </a:p>
@@ -458,7 +458,7 @@
           <a:p>
             <a:fld id="{D92049A4-B4B8-4181-8257-0C0C319DFF18}" type="datetimeFigureOut">
               <a:rPr lang="ko-KR" altLang="en-US" smtClean="0"/>
-              <a:t>2023-08-12</a:t>
+              <a:t>2023-08-21</a:t>
             </a:fld>
             <a:endParaRPr lang="ko-KR" altLang="en-US"/>
           </a:p>
@@ -666,7 +666,7 @@
           <a:p>
             <a:fld id="{D92049A4-B4B8-4181-8257-0C0C319DFF18}" type="datetimeFigureOut">
               <a:rPr lang="ko-KR" altLang="en-US" smtClean="0"/>
-              <a:t>2023-08-12</a:t>
+              <a:t>2023-08-21</a:t>
             </a:fld>
             <a:endParaRPr lang="ko-KR" altLang="en-US"/>
           </a:p>
@@ -864,7 +864,7 @@
           <a:p>
             <a:fld id="{D92049A4-B4B8-4181-8257-0C0C319DFF18}" type="datetimeFigureOut">
               <a:rPr lang="ko-KR" altLang="en-US" smtClean="0"/>
-              <a:t>2023-08-12</a:t>
+              <a:t>2023-08-21</a:t>
             </a:fld>
             <a:endParaRPr lang="ko-KR" altLang="en-US"/>
           </a:p>
@@ -1139,7 +1139,7 @@
           <a:p>
             <a:fld id="{D92049A4-B4B8-4181-8257-0C0C319DFF18}" type="datetimeFigureOut">
               <a:rPr lang="ko-KR" altLang="en-US" smtClean="0"/>
-              <a:t>2023-08-12</a:t>
+              <a:t>2023-08-21</a:t>
             </a:fld>
             <a:endParaRPr lang="ko-KR" altLang="en-US"/>
           </a:p>
@@ -1404,7 +1404,7 @@
           <a:p>
             <a:fld id="{D92049A4-B4B8-4181-8257-0C0C319DFF18}" type="datetimeFigureOut">
               <a:rPr lang="ko-KR" altLang="en-US" smtClean="0"/>
-              <a:t>2023-08-12</a:t>
+              <a:t>2023-08-21</a:t>
             </a:fld>
             <a:endParaRPr lang="ko-KR" altLang="en-US"/>
           </a:p>
@@ -1816,7 +1816,7 @@
           <a:p>
             <a:fld id="{D92049A4-B4B8-4181-8257-0C0C319DFF18}" type="datetimeFigureOut">
               <a:rPr lang="ko-KR" altLang="en-US" smtClean="0"/>
-              <a:t>2023-08-12</a:t>
+              <a:t>2023-08-21</a:t>
             </a:fld>
             <a:endParaRPr lang="ko-KR" altLang="en-US"/>
           </a:p>
@@ -1957,7 +1957,7 @@
           <a:p>
             <a:fld id="{D92049A4-B4B8-4181-8257-0C0C319DFF18}" type="datetimeFigureOut">
               <a:rPr lang="ko-KR" altLang="en-US" smtClean="0"/>
-              <a:t>2023-08-12</a:t>
+              <a:t>2023-08-21</a:t>
             </a:fld>
             <a:endParaRPr lang="ko-KR" altLang="en-US"/>
           </a:p>
@@ -2070,7 +2070,7 @@
           <a:p>
             <a:fld id="{D92049A4-B4B8-4181-8257-0C0C319DFF18}" type="datetimeFigureOut">
               <a:rPr lang="ko-KR" altLang="en-US" smtClean="0"/>
-              <a:t>2023-08-12</a:t>
+              <a:t>2023-08-21</a:t>
             </a:fld>
             <a:endParaRPr lang="ko-KR" altLang="en-US"/>
           </a:p>
@@ -2381,7 +2381,7 @@
           <a:p>
             <a:fld id="{D92049A4-B4B8-4181-8257-0C0C319DFF18}" type="datetimeFigureOut">
               <a:rPr lang="ko-KR" altLang="en-US" smtClean="0"/>
-              <a:t>2023-08-12</a:t>
+              <a:t>2023-08-21</a:t>
             </a:fld>
             <a:endParaRPr lang="ko-KR" altLang="en-US"/>
           </a:p>
@@ -2669,7 +2669,7 @@
           <a:p>
             <a:fld id="{D92049A4-B4B8-4181-8257-0C0C319DFF18}" type="datetimeFigureOut">
               <a:rPr lang="ko-KR" altLang="en-US" smtClean="0"/>
-              <a:t>2023-08-12</a:t>
+              <a:t>2023-08-21</a:t>
             </a:fld>
             <a:endParaRPr lang="ko-KR" altLang="en-US"/>
           </a:p>
@@ -2910,7 +2910,7 @@
           <a:p>
             <a:fld id="{D92049A4-B4B8-4181-8257-0C0C319DFF18}" type="datetimeFigureOut">
               <a:rPr lang="ko-KR" altLang="en-US" smtClean="0"/>
-              <a:t>2023-08-12</a:t>
+              <a:t>2023-08-21</a:t>
             </a:fld>
             <a:endParaRPr lang="ko-KR" altLang="en-US"/>
           </a:p>
@@ -3327,6 +3327,53 @@
           <a:chExt cx="0" cy="0"/>
         </a:xfrm>
       </p:grpSpPr>
+      <p:sp>
+        <p:nvSpPr>
+          <p:cNvPr id="2" name="직사각형 1">
+            <a:extLst>
+              <a:ext uri="{FF2B5EF4-FFF2-40B4-BE49-F238E27FC236}">
+                <a16:creationId xmlns:a16="http://schemas.microsoft.com/office/drawing/2014/main" id="{ECDD0395-846F-E409-B026-FCB14D1DBF02}"/>
+              </a:ext>
+            </a:extLst>
+          </p:cNvPr>
+          <p:cNvSpPr/>
+          <p:nvPr/>
+        </p:nvSpPr>
+        <p:spPr>
+          <a:xfrm>
+            <a:off x="0" y="0"/>
+            <a:ext cx="12192000" cy="6857999"/>
+          </a:xfrm>
+          <a:prstGeom prst="rect">
+            <a:avLst/>
+          </a:prstGeom>
+          <a:ln>
+            <a:noFill/>
+          </a:ln>
+        </p:spPr>
+        <p:style>
+          <a:lnRef idx="2">
+            <a:schemeClr val="accent6"/>
+          </a:lnRef>
+          <a:fillRef idx="1">
+            <a:schemeClr val="lt1"/>
+          </a:fillRef>
+          <a:effectRef idx="0">
+            <a:schemeClr val="accent6"/>
+          </a:effectRef>
+          <a:fontRef idx="minor">
+            <a:schemeClr val="dk1"/>
+          </a:fontRef>
+        </p:style>
+        <p:txBody>
+          <a:bodyPr rtlCol="0" anchor="ctr"/>
+          <a:lstStyle/>
+          <a:p>
+            <a:pPr algn="ctr"/>
+            <a:endParaRPr lang="ko-KR" altLang="en-US"/>
+          </a:p>
+        </p:txBody>
+      </p:sp>
       <p:pic>
         <p:nvPicPr>
           <p:cNvPr id="1026" name="Picture 2" descr="야생의 땅 : 듀랑고 기본 인터페이스 익히기 : 네이버 블로그">
@@ -5017,6 +5064,53 @@
           <a:chExt cx="0" cy="0"/>
         </a:xfrm>
       </p:grpSpPr>
+      <p:sp>
+        <p:nvSpPr>
+          <p:cNvPr id="3" name="직사각형 2">
+            <a:extLst>
+              <a:ext uri="{FF2B5EF4-FFF2-40B4-BE49-F238E27FC236}">
+                <a16:creationId xmlns:a16="http://schemas.microsoft.com/office/drawing/2014/main" id="{B75FB554-D9D5-5239-964D-4913A2C4D03D}"/>
+              </a:ext>
+            </a:extLst>
+          </p:cNvPr>
+          <p:cNvSpPr/>
+          <p:nvPr/>
+        </p:nvSpPr>
+        <p:spPr>
+          <a:xfrm>
+            <a:off x="0" y="0"/>
+            <a:ext cx="12192000" cy="6858000"/>
+          </a:xfrm>
+          <a:prstGeom prst="rect">
+            <a:avLst/>
+          </a:prstGeom>
+          <a:ln>
+            <a:noFill/>
+          </a:ln>
+        </p:spPr>
+        <p:style>
+          <a:lnRef idx="2">
+            <a:schemeClr val="accent6"/>
+          </a:lnRef>
+          <a:fillRef idx="1">
+            <a:schemeClr val="lt1"/>
+          </a:fillRef>
+          <a:effectRef idx="0">
+            <a:schemeClr val="accent6"/>
+          </a:effectRef>
+          <a:fontRef idx="minor">
+            <a:schemeClr val="dk1"/>
+          </a:fontRef>
+        </p:style>
+        <p:txBody>
+          <a:bodyPr rtlCol="0" anchor="ctr"/>
+          <a:lstStyle/>
+          <a:p>
+            <a:pPr algn="ctr"/>
+            <a:endParaRPr lang="ko-KR" altLang="en-US"/>
+          </a:p>
+        </p:txBody>
+      </p:sp>
       <p:pic>
         <p:nvPicPr>
           <p:cNvPr id="4" name="Picture 2" descr="야생의 땅 : 듀랑고 기본 인터페이스 익히기 : 네이버 블로그">
